--- a/examples/zh_campus.pptx
+++ b/examples/zh_campus.pptx
@@ -1483,9 +1483,33 @@
           </a:p>
         </p:txBody>
       </p:sp>
-      <p:sp>
-        <p:nvSpPr>
-          <p:cNvPr id="22" name="Shape 13"/>
+      <p:pic>
+        <p:nvPicPr>
+          <p:cNvPr id="22" name="照片" descr="preencoded.png">    </p:cNvPr>
+          <p:cNvPicPr>
+            <a:picLocks noChangeAspect="1"/>
+          </p:cNvPicPr>
+          <p:nvPr/>
+        </p:nvPicPr>
+        <p:blipFill>
+          <a:blip r:embed="rId11"/>
+          <a:stretch>
+            <a:fillRect/>
+          </a:stretch>
+        </p:blipFill>
+        <p:spPr>
+          <a:xfrm>
+            <a:off x="6263640" y="444500"/>
+            <a:ext cx="792480" cy="792480"/>
+          </a:xfrm>
+          <a:prstGeom prst="rect">
+            <a:avLst/>
+          </a:prstGeom>
+        </p:spPr>
+      </p:pic>
+      <p:sp>
+        <p:nvSpPr>
+          <p:cNvPr id="23" name="Shape 13"/>
           <p:cNvSpPr/>
           <p:nvPr/>
         </p:nvSpPr>
@@ -1507,7 +1531,7 @@
       </p:sp>
       <p:sp>
         <p:nvSpPr>
-          <p:cNvPr id="23" name="教育经历"/>
+          <p:cNvPr id="24" name="教育经历"/>
           <p:cNvSpPr txBox="1"/>
           <p:nvPr/>
         </p:nvSpPr>
@@ -1549,7 +1573,7 @@
       </p:sp>
       <p:sp>
         <p:nvSpPr>
-          <p:cNvPr id="24" name="某某大学"/>
+          <p:cNvPr id="25" name="某某大学"/>
           <p:cNvSpPr txBox="1"/>
           <p:nvPr/>
         </p:nvSpPr>
@@ -1591,7 +1615,7 @@
       </p:sp>
       <p:sp>
         <p:nvSpPr>
-          <p:cNvPr id="25" name="时间"/>
+          <p:cNvPr id="26" name="时间"/>
           <p:cNvSpPr txBox="1"/>
           <p:nvPr/>
         </p:nvSpPr>
@@ -1633,7 +1657,7 @@
       </p:sp>
       <p:sp>
         <p:nvSpPr>
-          <p:cNvPr id="26" name="右侧副信息"/>
+          <p:cNvPr id="27" name="右侧副信息"/>
           <p:cNvSpPr txBox="1"/>
           <p:nvPr/>
         </p:nvSpPr>
@@ -1675,7 +1699,7 @@
       </p:sp>
       <p:sp>
         <p:nvSpPr>
-          <p:cNvPr id="27" name="副标题"/>
+          <p:cNvPr id="28" name="副标题"/>
           <p:cNvSpPr txBox="1"/>
           <p:nvPr/>
         </p:nvSpPr>
@@ -1717,7 +1741,7 @@
       </p:sp>
       <p:sp>
         <p:nvSpPr>
-          <p:cNvPr id="28" name="明细"/>
+          <p:cNvPr id="29" name="明细"/>
           <p:cNvSpPr txBox="1"/>
           <p:nvPr/>
         </p:nvSpPr>
@@ -1792,7 +1816,7 @@
       </p:sp>
       <p:sp>
         <p:nvSpPr>
-          <p:cNvPr id="29" name="明细"/>
+          <p:cNvPr id="30" name="明细"/>
           <p:cNvSpPr txBox="1"/>
           <p:nvPr/>
         </p:nvSpPr>
@@ -1845,7 +1869,7 @@
       </p:sp>
       <p:sp>
         <p:nvSpPr>
-          <p:cNvPr id="30" name="Shape 21"/>
+          <p:cNvPr id="31" name="Shape 21"/>
           <p:cNvSpPr/>
           <p:nvPr/>
         </p:nvSpPr>
@@ -1867,7 +1891,7 @@
       </p:sp>
       <p:sp>
         <p:nvSpPr>
-          <p:cNvPr id="31" name="实习经历"/>
+          <p:cNvPr id="32" name="实习经历"/>
           <p:cNvSpPr txBox="1"/>
           <p:nvPr/>
         </p:nvSpPr>
@@ -1909,7 +1933,7 @@
       </p:sp>
       <p:sp>
         <p:nvSpPr>
-          <p:cNvPr id="32" name="某互联网公司 · 前端开发实习生"/>
+          <p:cNvPr id="33" name="某互联网公司 · 前端开发实习生"/>
           <p:cNvSpPr txBox="1"/>
           <p:nvPr/>
         </p:nvSpPr>
@@ -1951,7 +1975,7 @@
       </p:sp>
       <p:sp>
         <p:nvSpPr>
-          <p:cNvPr id="33" name="时间"/>
+          <p:cNvPr id="34" name="时间"/>
           <p:cNvSpPr txBox="1"/>
           <p:nvPr/>
         </p:nvSpPr>
@@ -1993,7 +2017,7 @@
       </p:sp>
       <p:sp>
         <p:nvSpPr>
-          <p:cNvPr id="34" name="明细"/>
+          <p:cNvPr id="35" name="明细"/>
           <p:cNvSpPr txBox="1"/>
           <p:nvPr/>
         </p:nvSpPr>
@@ -2046,7 +2070,7 @@
       </p:sp>
       <p:sp>
         <p:nvSpPr>
-          <p:cNvPr id="35" name="列表_某互联网公司 · 前端开发实习生"/>
+          <p:cNvPr id="36" name="列表_某互联网公司 · 前端开发实习生"/>
           <p:cNvSpPr txBox="1"/>
           <p:nvPr/>
         </p:nvSpPr>
@@ -2233,7 +2257,7 @@
       </p:sp>
       <p:sp>
         <p:nvSpPr>
-          <p:cNvPr id="36" name="Shape 27"/>
+          <p:cNvPr id="37" name="Shape 27"/>
           <p:cNvSpPr/>
           <p:nvPr/>
         </p:nvSpPr>
@@ -2255,7 +2279,7 @@
       </p:sp>
       <p:sp>
         <p:nvSpPr>
-          <p:cNvPr id="37" name="项目经历"/>
+          <p:cNvPr id="38" name="项目经历"/>
           <p:cNvSpPr txBox="1"/>
           <p:nvPr/>
         </p:nvSpPr>
@@ -2297,7 +2321,7 @@
       </p:sp>
       <p:sp>
         <p:nvSpPr>
-          <p:cNvPr id="38" name="校园二手交易小程序"/>
+          <p:cNvPr id="39" name="校园二手交易小程序"/>
           <p:cNvSpPr txBox="1"/>
           <p:nvPr/>
         </p:nvSpPr>
@@ -2339,7 +2363,7 @@
       </p:sp>
       <p:sp>
         <p:nvSpPr>
-          <p:cNvPr id="39" name="时间"/>
+          <p:cNvPr id="40" name="时间"/>
           <p:cNvSpPr txBox="1"/>
           <p:nvPr/>
         </p:nvSpPr>
@@ -2381,7 +2405,7 @@
       </p:sp>
       <p:sp>
         <p:nvSpPr>
-          <p:cNvPr id="40" name="明细"/>
+          <p:cNvPr id="41" name="明细"/>
           <p:cNvSpPr txBox="1"/>
           <p:nvPr/>
         </p:nvSpPr>
@@ -2434,7 +2458,7 @@
       </p:sp>
       <p:sp>
         <p:nvSpPr>
-          <p:cNvPr id="41" name="明细"/>
+          <p:cNvPr id="42" name="明细"/>
           <p:cNvSpPr txBox="1"/>
           <p:nvPr/>
         </p:nvSpPr>
@@ -2509,7 +2533,7 @@
       </p:sp>
       <p:sp>
         <p:nvSpPr>
-          <p:cNvPr id="42" name="列表_校园二手交易小程序"/>
+          <p:cNvPr id="43" name="列表_校园二手交易小程序"/>
           <p:cNvSpPr txBox="1"/>
           <p:nvPr/>
         </p:nvSpPr>
@@ -2619,7 +2643,7 @@
       </p:sp>
       <p:sp>
         <p:nvSpPr>
-          <p:cNvPr id="43" name="技能卡片"/>
+          <p:cNvPr id="44" name="技能卡片"/>
           <p:cNvSpPr/>
           <p:nvPr/>
         </p:nvSpPr>
@@ -2641,7 +2665,7 @@
       </p:sp>
       <p:sp>
         <p:nvSpPr>
-          <p:cNvPr id="44" name="Shape 35"/>
+          <p:cNvPr id="45" name="Shape 35"/>
           <p:cNvSpPr/>
           <p:nvPr/>
         </p:nvSpPr>
@@ -2663,7 +2687,7 @@
       </p:sp>
       <p:sp>
         <p:nvSpPr>
-          <p:cNvPr id="45" name="技能"/>
+          <p:cNvPr id="46" name="技能"/>
           <p:cNvSpPr txBox="1"/>
           <p:nvPr/>
         </p:nvSpPr>
@@ -2705,7 +2729,7 @@
       </p:sp>
       <p:sp>
         <p:nvSpPr>
-          <p:cNvPr id="46" name="内容"/>
+          <p:cNvPr id="47" name="内容"/>
           <p:cNvSpPr txBox="1"/>
           <p:nvPr/>
         </p:nvSpPr>
@@ -2897,7 +2921,7 @@
       </p:sp>
       <p:sp>
         <p:nvSpPr>
-          <p:cNvPr id="47" name="证书卡片"/>
+          <p:cNvPr id="48" name="证书卡片"/>
           <p:cNvSpPr/>
           <p:nvPr/>
         </p:nvSpPr>
@@ -2919,7 +2943,7 @@
       </p:sp>
       <p:sp>
         <p:nvSpPr>
-          <p:cNvPr id="48" name="Shape 39"/>
+          <p:cNvPr id="49" name="Shape 39"/>
           <p:cNvSpPr/>
           <p:nvPr/>
         </p:nvSpPr>
@@ -2941,7 +2965,7 @@
       </p:sp>
       <p:sp>
         <p:nvSpPr>
-          <p:cNvPr id="49" name="证书"/>
+          <p:cNvPr id="50" name="证书"/>
           <p:cNvSpPr txBox="1"/>
           <p:nvPr/>
         </p:nvSpPr>
@@ -2983,7 +3007,7 @@
       </p:sp>
       <p:sp>
         <p:nvSpPr>
-          <p:cNvPr id="50" name="CET-6"/>
+          <p:cNvPr id="51" name="CET-6"/>
           <p:cNvSpPr txBox="1"/>
           <p:nvPr/>
         </p:nvSpPr>
@@ -3025,7 +3049,7 @@
       </p:sp>
       <p:sp>
         <p:nvSpPr>
-          <p:cNvPr id="51" name="时间"/>
+          <p:cNvPr id="52" name="时间"/>
           <p:cNvSpPr txBox="1"/>
           <p:nvPr/>
         </p:nvSpPr>
@@ -3067,7 +3091,7 @@
       </p:sp>
       <p:sp>
         <p:nvSpPr>
-          <p:cNvPr id="52" name="Shape 43"/>
+          <p:cNvPr id="53" name="Shape 43"/>
           <p:cNvSpPr/>
           <p:nvPr/>
         </p:nvSpPr>
@@ -3089,7 +3113,7 @@
       </p:sp>
       <p:sp>
         <p:nvSpPr>
-          <p:cNvPr id="53" name="Shape 44"/>
+          <p:cNvPr id="54" name="Shape 44"/>
           <p:cNvSpPr/>
           <p:nvPr/>
         </p:nvSpPr>
@@ -3111,7 +3135,7 @@
       </p:sp>
       <p:sp>
         <p:nvSpPr>
-          <p:cNvPr id="54" name="Shape 45"/>
+          <p:cNvPr id="55" name="Shape 45"/>
           <p:cNvSpPr/>
           <p:nvPr/>
         </p:nvSpPr>
@@ -3133,7 +3157,7 @@
       </p:sp>
       <p:sp>
         <p:nvSpPr>
-          <p:cNvPr id="55" name="CET-6内容"/>
+          <p:cNvPr id="56" name="CET-6内容"/>
           <p:cNvSpPr txBox="1"/>
           <p:nvPr/>
         </p:nvSpPr>
@@ -3197,7 +3221,7 @@
       </p:sp>
       <p:sp>
         <p:nvSpPr>
-          <p:cNvPr id="56" name="软件设计师"/>
+          <p:cNvPr id="57" name="软件设计师"/>
           <p:cNvSpPr txBox="1"/>
           <p:nvPr/>
         </p:nvSpPr>
@@ -3239,7 +3263,7 @@
       </p:sp>
       <p:sp>
         <p:nvSpPr>
-          <p:cNvPr id="57" name="时间"/>
+          <p:cNvPr id="58" name="时间"/>
           <p:cNvSpPr txBox="1"/>
           <p:nvPr/>
         </p:nvSpPr>
@@ -3281,7 +3305,7 @@
       </p:sp>
       <p:sp>
         <p:nvSpPr>
-          <p:cNvPr id="58" name="Shape 49"/>
+          <p:cNvPr id="59" name="Shape 49"/>
           <p:cNvSpPr/>
           <p:nvPr/>
         </p:nvSpPr>
@@ -3303,7 +3327,7 @@
       </p:sp>
       <p:sp>
         <p:nvSpPr>
-          <p:cNvPr id="59" name="Shape 50"/>
+          <p:cNvPr id="60" name="Shape 50"/>
           <p:cNvSpPr/>
           <p:nvPr/>
         </p:nvSpPr>
@@ -3325,7 +3349,7 @@
       </p:sp>
       <p:sp>
         <p:nvSpPr>
-          <p:cNvPr id="60" name="Shape 51"/>
+          <p:cNvPr id="61" name="Shape 51"/>
           <p:cNvSpPr/>
           <p:nvPr/>
         </p:nvSpPr>
@@ -3347,7 +3371,7 @@
       </p:sp>
       <p:sp>
         <p:nvSpPr>
-          <p:cNvPr id="61" name="软件设计师内容"/>
+          <p:cNvPr id="62" name="软件设计师内容"/>
           <p:cNvSpPr txBox="1"/>
           <p:nvPr/>
         </p:nvSpPr>
@@ -3389,7 +3413,7 @@
       </p:sp>
       <p:sp>
         <p:nvSpPr>
-          <p:cNvPr id="62" name="荣誉卡片"/>
+          <p:cNvPr id="63" name="荣誉卡片"/>
           <p:cNvSpPr/>
           <p:nvPr/>
         </p:nvSpPr>
@@ -3411,7 +3435,7 @@
       </p:sp>
       <p:sp>
         <p:nvSpPr>
-          <p:cNvPr id="63" name="Shape 54"/>
+          <p:cNvPr id="64" name="Shape 54"/>
           <p:cNvSpPr/>
           <p:nvPr/>
         </p:nvSpPr>
@@ -3433,7 +3457,7 @@
       </p:sp>
       <p:sp>
         <p:nvSpPr>
-          <p:cNvPr id="64" name="荣誉"/>
+          <p:cNvPr id="65" name="荣誉"/>
           <p:cNvSpPr txBox="1"/>
           <p:nvPr/>
         </p:nvSpPr>
@@ -3475,7 +3499,7 @@
       </p:sp>
       <p:sp>
         <p:nvSpPr>
-          <p:cNvPr id="65" name="国家励志奖学金"/>
+          <p:cNvPr id="66" name="国家励志奖学金"/>
           <p:cNvSpPr txBox="1"/>
           <p:nvPr/>
         </p:nvSpPr>
@@ -3517,7 +3541,7 @@
       </p:sp>
       <p:sp>
         <p:nvSpPr>
-          <p:cNvPr id="66" name="时间"/>
+          <p:cNvPr id="67" name="时间"/>
           <p:cNvSpPr txBox="1"/>
           <p:nvPr/>
         </p:nvSpPr>
@@ -3559,7 +3583,7 @@
       </p:sp>
       <p:sp>
         <p:nvSpPr>
-          <p:cNvPr id="67" name="Shape 58"/>
+          <p:cNvPr id="68" name="Shape 58"/>
           <p:cNvSpPr/>
           <p:nvPr/>
         </p:nvSpPr>
@@ -3581,7 +3605,7 @@
       </p:sp>
       <p:sp>
         <p:nvSpPr>
-          <p:cNvPr id="68" name="Shape 59"/>
+          <p:cNvPr id="69" name="Shape 59"/>
           <p:cNvSpPr/>
           <p:nvPr/>
         </p:nvSpPr>
@@ -3603,7 +3627,7 @@
       </p:sp>
       <p:sp>
         <p:nvSpPr>
-          <p:cNvPr id="69" name="Shape 60"/>
+          <p:cNvPr id="70" name="Shape 60"/>
           <p:cNvSpPr/>
           <p:nvPr/>
         </p:nvSpPr>
@@ -3625,7 +3649,7 @@
       </p:sp>
       <p:sp>
         <p:nvSpPr>
-          <p:cNvPr id="70" name="国家励志奖学金内容"/>
+          <p:cNvPr id="71" name="国家励志奖学金内容"/>
           <p:cNvSpPr txBox="1"/>
           <p:nvPr/>
         </p:nvSpPr>

--- a/examples/zh_campus.pptx
+++ b/examples/zh_campus.pptx
@@ -990,7 +990,7 @@
         <p:spPr>
           <a:xfrm>
             <a:off x="381000" y="1035050"/>
-            <a:ext cx="1008916" cy="215900"/>
+            <a:ext cx="1068232" cy="215900"/>
           </a:xfrm>
           <a:prstGeom prst="roundRect">
             <a:avLst>
@@ -1038,7 +1038,7 @@
         <p:spPr>
           <a:xfrm>
             <a:off x="610870" y="1035050"/>
-            <a:ext cx="779046" cy="215900"/>
+            <a:ext cx="838362" cy="215900"/>
           </a:xfrm>
           <a:prstGeom prst="rect">
             <a:avLst/>
@@ -1047,7 +1047,7 @@
           <a:ln/>
         </p:spPr>
         <p:txBody>
-          <a:bodyPr wrap="square" lIns="0" tIns="0" rIns="0" bIns="0" rtlCol="0" anchor="ctr"/>
+          <a:bodyPr wrap="none" lIns="0" tIns="0" rIns="0" bIns="0" rtlCol="0" anchor="ctr"/>
           <a:lstStyle/>
           <a:p>
             <a:pPr algn="l" indent="0" marL="0">
@@ -1079,8 +1079,8 @@
         </p:nvSpPr>
         <p:spPr>
           <a:xfrm>
-            <a:off x="1440716" y="1035050"/>
-            <a:ext cx="1540658" cy="215900"/>
+            <a:off x="1500032" y="1035050"/>
+            <a:ext cx="1631879" cy="215900"/>
           </a:xfrm>
           <a:prstGeom prst="roundRect">
             <a:avLst>
@@ -1111,7 +1111,7 @@
         </p:blipFill>
         <p:spPr>
           <a:xfrm>
-            <a:off x="1520726" y="1089025"/>
+            <a:off x="1580042" y="1089025"/>
             <a:ext cx="107950" cy="107950"/>
           </a:xfrm>
           <a:prstGeom prst="rect">
@@ -1127,8 +1127,8 @@
         </p:nvSpPr>
         <p:spPr>
           <a:xfrm>
-            <a:off x="1670586" y="1035050"/>
-            <a:ext cx="1310788" cy="215900"/>
+            <a:off x="1729902" y="1035050"/>
+            <a:ext cx="1402009" cy="215900"/>
           </a:xfrm>
           <a:prstGeom prst="rect">
             <a:avLst/>
@@ -1137,7 +1137,7 @@
           <a:ln/>
         </p:spPr>
         <p:txBody>
-          <a:bodyPr wrap="square" lIns="0" tIns="0" rIns="0" bIns="0" rtlCol="0" anchor="ctr"/>
+          <a:bodyPr wrap="none" lIns="0" tIns="0" rIns="0" bIns="0" rtlCol="0" anchor="ctr"/>
           <a:lstStyle/>
           <a:p>
             <a:pPr algn="l" indent="0" marL="0">
@@ -1179,8 +1179,8 @@
         </p:blipFill>
         <p:spPr>
           <a:xfrm>
-            <a:off x="1440716" y="1035050"/>
-            <a:ext cx="1540658" cy="215900"/>
+            <a:off x="1500032" y="1035050"/>
+            <a:ext cx="1631879" cy="215900"/>
           </a:xfrm>
           <a:prstGeom prst="rect">
             <a:avLst/>
@@ -1195,8 +1195,8 @@
         </p:nvSpPr>
         <p:spPr>
           <a:xfrm>
-            <a:off x="3032175" y="1035050"/>
-            <a:ext cx="1344026" cy="215900"/>
+            <a:off x="3182711" y="1035050"/>
+            <a:ext cx="1423448" cy="215900"/>
           </a:xfrm>
           <a:prstGeom prst="roundRect">
             <a:avLst>
@@ -1227,7 +1227,7 @@
         </p:blipFill>
         <p:spPr>
           <a:xfrm>
-            <a:off x="3112185" y="1089025"/>
+            <a:off x="3262721" y="1089025"/>
             <a:ext cx="107950" cy="107950"/>
           </a:xfrm>
           <a:prstGeom prst="rect">
@@ -1243,8 +1243,8 @@
         </p:nvSpPr>
         <p:spPr>
           <a:xfrm>
-            <a:off x="3262045" y="1035050"/>
-            <a:ext cx="1114156" cy="215900"/>
+            <a:off x="3412581" y="1035050"/>
+            <a:ext cx="1193578" cy="215900"/>
           </a:xfrm>
           <a:prstGeom prst="rect">
             <a:avLst/>
@@ -1253,7 +1253,7 @@
           <a:ln/>
         </p:spPr>
         <p:txBody>
-          <a:bodyPr wrap="square" lIns="0" tIns="0" rIns="0" bIns="0" rtlCol="0" anchor="ctr"/>
+          <a:bodyPr wrap="none" lIns="0" tIns="0" rIns="0" bIns="0" rtlCol="0" anchor="ctr"/>
           <a:lstStyle/>
           <a:p>
             <a:pPr algn="l" indent="0" marL="0">
@@ -1295,8 +1295,8 @@
         </p:blipFill>
         <p:spPr>
           <a:xfrm>
-            <a:off x="3032175" y="1035050"/>
-            <a:ext cx="1344026" cy="215900"/>
+            <a:off x="3182711" y="1035050"/>
+            <a:ext cx="1423448" cy="215900"/>
           </a:xfrm>
           <a:prstGeom prst="rect">
             <a:avLst/>
@@ -1311,8 +1311,8 @@
         </p:nvSpPr>
         <p:spPr>
           <a:xfrm>
-            <a:off x="4427001" y="1035050"/>
-            <a:ext cx="642620" cy="215900"/>
+            <a:off x="4656959" y="1035050"/>
+            <a:ext cx="679958" cy="215900"/>
           </a:xfrm>
           <a:prstGeom prst="roundRect">
             <a:avLst>
@@ -1343,7 +1343,7 @@
         </p:blipFill>
         <p:spPr>
           <a:xfrm>
-            <a:off x="4507011" y="1089025"/>
+            <a:off x="4736969" y="1089025"/>
             <a:ext cx="107950" cy="107950"/>
           </a:xfrm>
           <a:prstGeom prst="rect">
@@ -1359,8 +1359,8 @@
         </p:nvSpPr>
         <p:spPr>
           <a:xfrm>
-            <a:off x="4656871" y="1035050"/>
-            <a:ext cx="412750" cy="215900"/>
+            <a:off x="4886829" y="1035050"/>
+            <a:ext cx="450088" cy="215900"/>
           </a:xfrm>
           <a:prstGeom prst="rect">
             <a:avLst/>
@@ -1369,7 +1369,7 @@
           <a:ln/>
         </p:spPr>
         <p:txBody>
-          <a:bodyPr wrap="square" lIns="0" tIns="0" rIns="0" bIns="0" rtlCol="0" anchor="ctr"/>
+          <a:bodyPr wrap="none" lIns="0" tIns="0" rIns="0" bIns="0" rtlCol="0" anchor="ctr"/>
           <a:lstStyle/>
           <a:p>
             <a:pPr algn="l" indent="0" marL="0">
@@ -1411,8 +1411,8 @@
         </p:blipFill>
         <p:spPr>
           <a:xfrm>
-            <a:off x="4427001" y="1035050"/>
-            <a:ext cx="642620" cy="215900"/>
+            <a:off x="4656959" y="1035050"/>
+            <a:ext cx="679958" cy="215900"/>
           </a:xfrm>
           <a:prstGeom prst="rect">
             <a:avLst/>
@@ -1502,7 +1502,7 @@
             <a:off x="6263640" y="444500"/>
             <a:ext cx="792480" cy="792480"/>
           </a:xfrm>
-          <a:prstGeom prst="rect">
+          <a:prstGeom prst="ellipse">
             <a:avLst/>
           </a:prstGeom>
         </p:spPr>
